--- a/project 2/project 2 (1).pptx
+++ b/project 2/project 2 (1).pptx
@@ -386,7 +386,7 @@
             <a:fld id="{1D8BD707-D9CF-40AE-B4C6-C98DA3205C09}" type="datetimeFigureOut">
               <a:rPr lang="en-US" smtClean="0"/>
               <a:pPr/>
-              <a:t>4/20/2026</a:t>
+              <a:t>5/4/2026</a:t>
             </a:fld>
             <a:endParaRPr lang="en-US"/>
           </a:p>
@@ -551,7 +551,7 @@
             <a:fld id="{1D8BD707-D9CF-40AE-B4C6-C98DA3205C09}" type="datetimeFigureOut">
               <a:rPr lang="en-US" smtClean="0"/>
               <a:pPr/>
-              <a:t>4/20/2026</a:t>
+              <a:t>5/4/2026</a:t>
             </a:fld>
             <a:endParaRPr lang="en-US"/>
           </a:p>
@@ -726,7 +726,7 @@
             <a:fld id="{1D8BD707-D9CF-40AE-B4C6-C98DA3205C09}" type="datetimeFigureOut">
               <a:rPr lang="en-US" smtClean="0"/>
               <a:pPr/>
-              <a:t>4/20/2026</a:t>
+              <a:t>5/4/2026</a:t>
             </a:fld>
             <a:endParaRPr lang="en-US"/>
           </a:p>
@@ -891,7 +891,7 @@
             <a:fld id="{1D8BD707-D9CF-40AE-B4C6-C98DA3205C09}" type="datetimeFigureOut">
               <a:rPr lang="en-US" smtClean="0"/>
               <a:pPr/>
-              <a:t>4/20/2026</a:t>
+              <a:t>5/4/2026</a:t>
             </a:fld>
             <a:endParaRPr lang="en-US"/>
           </a:p>
@@ -1133,7 +1133,7 @@
             <a:fld id="{1D8BD707-D9CF-40AE-B4C6-C98DA3205C09}" type="datetimeFigureOut">
               <a:rPr lang="en-US" smtClean="0"/>
               <a:pPr/>
-              <a:t>4/20/2026</a:t>
+              <a:t>5/4/2026</a:t>
             </a:fld>
             <a:endParaRPr lang="en-US"/>
           </a:p>
@@ -1415,7 +1415,7 @@
             <a:fld id="{1D8BD707-D9CF-40AE-B4C6-C98DA3205C09}" type="datetimeFigureOut">
               <a:rPr lang="en-US" smtClean="0"/>
               <a:pPr/>
-              <a:t>4/20/2026</a:t>
+              <a:t>5/4/2026</a:t>
             </a:fld>
             <a:endParaRPr lang="en-US"/>
           </a:p>
@@ -1831,7 +1831,7 @@
             <a:fld id="{1D8BD707-D9CF-40AE-B4C6-C98DA3205C09}" type="datetimeFigureOut">
               <a:rPr lang="en-US" smtClean="0"/>
               <a:pPr/>
-              <a:t>4/20/2026</a:t>
+              <a:t>5/4/2026</a:t>
             </a:fld>
             <a:endParaRPr lang="en-US"/>
           </a:p>
@@ -1945,7 +1945,7 @@
             <a:fld id="{1D8BD707-D9CF-40AE-B4C6-C98DA3205C09}" type="datetimeFigureOut">
               <a:rPr lang="en-US" smtClean="0"/>
               <a:pPr/>
-              <a:t>4/20/2026</a:t>
+              <a:t>5/4/2026</a:t>
             </a:fld>
             <a:endParaRPr lang="en-US"/>
           </a:p>
@@ -2037,7 +2037,7 @@
             <a:fld id="{1D8BD707-D9CF-40AE-B4C6-C98DA3205C09}" type="datetimeFigureOut">
               <a:rPr lang="en-US" smtClean="0"/>
               <a:pPr/>
-              <a:t>4/20/2026</a:t>
+              <a:t>5/4/2026</a:t>
             </a:fld>
             <a:endParaRPr lang="en-US"/>
           </a:p>
@@ -2309,7 +2309,7 @@
             <a:fld id="{1D8BD707-D9CF-40AE-B4C6-C98DA3205C09}" type="datetimeFigureOut">
               <a:rPr lang="en-US" smtClean="0"/>
               <a:pPr/>
-              <a:t>4/20/2026</a:t>
+              <a:t>5/4/2026</a:t>
             </a:fld>
             <a:endParaRPr lang="en-US"/>
           </a:p>
@@ -2558,7 +2558,7 @@
             <a:fld id="{1D8BD707-D9CF-40AE-B4C6-C98DA3205C09}" type="datetimeFigureOut">
               <a:rPr lang="en-US" smtClean="0"/>
               <a:pPr/>
-              <a:t>4/20/2026</a:t>
+              <a:t>5/4/2026</a:t>
             </a:fld>
             <a:endParaRPr lang="en-US"/>
           </a:p>
@@ -2766,7 +2766,7 @@
             <a:fld id="{1D8BD707-D9CF-40AE-B4C6-C98DA3205C09}" type="datetimeFigureOut">
               <a:rPr lang="en-US" smtClean="0"/>
               <a:pPr/>
-              <a:t>4/20/2026</a:t>
+              <a:t>5/4/2026</a:t>
             </a:fld>
             <a:endParaRPr lang="en-US"/>
           </a:p>
@@ -3536,8 +3536,25 @@
                 <a:latin typeface="Arial" panose="020B0604020202020204" pitchFamily="34" charset="0"/>
                 <a:cs typeface="Arial" panose="020B0604020202020204" pitchFamily="34" charset="0"/>
               </a:rPr>
-              <a:t>PROJECT REVIEW : MILESTONE PROJECT – 1</a:t>
+              <a:t>PROJECT REVIEW : MILESTONE PROJECT </a:t>
             </a:r>
+            <a:r>
+              <a:rPr lang="en-IN" sz="3600" b="1">
+                <a:solidFill>
+                  <a:srgbClr val="C00000"/>
+                </a:solidFill>
+                <a:latin typeface="Arial" panose="020B0604020202020204" pitchFamily="34" charset="0"/>
+                <a:cs typeface="Arial" panose="020B0604020202020204" pitchFamily="34" charset="0"/>
+              </a:rPr>
+              <a:t>– 2</a:t>
+            </a:r>
+            <a:endParaRPr lang="en-IN" sz="3600" b="1" dirty="0">
+              <a:solidFill>
+                <a:srgbClr val="C00000"/>
+              </a:solidFill>
+              <a:latin typeface="Arial" panose="020B0604020202020204" pitchFamily="34" charset="0"/>
+              <a:cs typeface="Arial" panose="020B0604020202020204" pitchFamily="34" charset="0"/>
+            </a:endParaRPr>
           </a:p>
           <a:p>
             <a:pPr algn="ctr"/>
